--- a/554_Poster.pptx
+++ b/554_Poster.pptx
@@ -543,7 +543,7 @@
               <a:pPr>
                 <a:defRPr/>
               </a:pPr>
-              <a:t>4/17/25</a:t>
+              <a:t>4/18/2025</a:t>
             </a:fld>
             <a:endParaRPr lang="en-US" altLang="en-US"/>
           </a:p>
@@ -3373,10 +3373,10 @@
       </p:sp>
       <p:sp>
         <p:nvSpPr>
-          <p:cNvPr id="35" name="Rectangle 34">
-            <a:extLst>
-              <a:ext uri="{FF2B5EF4-FFF2-40B4-BE49-F238E27FC236}">
-                <a16:creationId xmlns:a16="http://schemas.microsoft.com/office/drawing/2014/main" id="{53EFABFA-008E-4AD2-BBCA-B22FCA2707EF}"/>
+          <p:cNvPr id="36" name="Rectangle 35">
+            <a:extLst>
+              <a:ext uri="{FF2B5EF4-FFF2-40B4-BE49-F238E27FC236}">
+                <a16:creationId xmlns:a16="http://schemas.microsoft.com/office/drawing/2014/main" id="{7FE94BF9-C824-47B0-897E-0B5D22594F20}"/>
               </a:ext>
             </a:extLst>
           </p:cNvPr>
@@ -3385,8 +3385,8 @@
         </p:nvSpPr>
         <p:spPr>
           <a:xfrm>
-            <a:off x="294720" y="15385879"/>
-            <a:ext cx="13297104" cy="1381995"/>
+            <a:off x="25987766" y="17675094"/>
+            <a:ext cx="12512284" cy="1381994"/>
           </a:xfrm>
           <a:prstGeom prst="rect">
             <a:avLst/>
@@ -3426,17 +3426,17 @@
                 <a:latin typeface="Arial" panose="020B0604020202020204" pitchFamily="34" charset="0"/>
                 <a:cs typeface="Arial" panose="020B0604020202020204" pitchFamily="34" charset="0"/>
               </a:rPr>
-              <a:t>Translation Layer</a:t>
+              <a:t>Servo Driver</a:t>
             </a:r>
           </a:p>
         </p:txBody>
       </p:sp>
       <p:sp>
         <p:nvSpPr>
-          <p:cNvPr id="36" name="Rectangle 35">
-            <a:extLst>
-              <a:ext uri="{FF2B5EF4-FFF2-40B4-BE49-F238E27FC236}">
-                <a16:creationId xmlns:a16="http://schemas.microsoft.com/office/drawing/2014/main" id="{7FE94BF9-C824-47B0-897E-0B5D22594F20}"/>
+          <p:cNvPr id="15375" name="Rectangle 15374">
+            <a:extLst>
+              <a:ext uri="{FF2B5EF4-FFF2-40B4-BE49-F238E27FC236}">
+                <a16:creationId xmlns:a16="http://schemas.microsoft.com/office/drawing/2014/main" id="{D3C792C5-0E28-4AC8-A408-EE6044A2CDE1}"/>
               </a:ext>
             </a:extLst>
           </p:cNvPr>
@@ -3445,8 +3445,8 @@
         </p:nvSpPr>
         <p:spPr>
           <a:xfrm>
-            <a:off x="25987766" y="17675094"/>
-            <a:ext cx="12512284" cy="1381994"/>
+            <a:off x="310512" y="378400"/>
+            <a:ext cx="6731104" cy="3780733"/>
           </a:xfrm>
           <a:prstGeom prst="rect">
             <a:avLst/>
@@ -3478,25 +3478,61 @@
           <a:lstStyle/>
           <a:p>
             <a:pPr algn="ctr"/>
-            <a:r>
-              <a:rPr lang="en-US" sz="5733" b="1" dirty="0">
-                <a:solidFill>
-                  <a:schemeClr val="bg1"/>
-                </a:solidFill>
-                <a:latin typeface="Arial" panose="020B0604020202020204" pitchFamily="34" charset="0"/>
-                <a:cs typeface="Arial" panose="020B0604020202020204" pitchFamily="34" charset="0"/>
-              </a:rPr>
-              <a:t>Servo Driver</a:t>
-            </a:r>
+            <a:endParaRPr lang="en-US" sz="5016" b="1" dirty="0">
+              <a:solidFill>
+                <a:schemeClr val="bg1"/>
+              </a:solidFill>
+              <a:latin typeface="Arial" panose="020B0604020202020204" pitchFamily="34" charset="0"/>
+              <a:cs typeface="Arial" panose="020B0604020202020204" pitchFamily="34" charset="0"/>
+            </a:endParaRPr>
           </a:p>
         </p:txBody>
       </p:sp>
       <p:sp>
         <p:nvSpPr>
-          <p:cNvPr id="15375" name="Rectangle 15374">
-            <a:extLst>
-              <a:ext uri="{FF2B5EF4-FFF2-40B4-BE49-F238E27FC236}">
-                <a16:creationId xmlns:a16="http://schemas.microsoft.com/office/drawing/2014/main" id="{D3C792C5-0E28-4AC8-A408-EE6044A2CDE1}"/>
+          <p:cNvPr id="15377" name="TextBox 15376">
+            <a:extLst>
+              <a:ext uri="{FF2B5EF4-FFF2-40B4-BE49-F238E27FC236}">
+                <a16:creationId xmlns:a16="http://schemas.microsoft.com/office/drawing/2014/main" id="{6F71B1B2-8A49-474C-A9E7-25462C6514C8}"/>
+              </a:ext>
+            </a:extLst>
+          </p:cNvPr>
+          <p:cNvSpPr txBox="1"/>
+          <p:nvPr/>
+        </p:nvSpPr>
+        <p:spPr>
+          <a:xfrm>
+            <a:off x="-488414" y="28655434"/>
+            <a:ext cx="8416086" cy="680507"/>
+          </a:xfrm>
+          <a:prstGeom prst="rect">
+            <a:avLst/>
+          </a:prstGeom>
+          <a:noFill/>
+        </p:spPr>
+        <p:txBody>
+          <a:bodyPr wrap="none" rtlCol="0">
+            <a:spAutoFit/>
+          </a:bodyPr>
+          <a:lstStyle/>
+          <a:p>
+            <a:r>
+              <a:rPr lang="en-US" sz="3822" b="1" dirty="0">
+                <a:solidFill>
+                  <a:schemeClr val="bg1"/>
+                </a:solidFill>
+              </a:rPr>
+              <a:t>           ECE Capstone Open House 2024</a:t>
+            </a:r>
+          </a:p>
+        </p:txBody>
+      </p:sp>
+      <p:sp>
+        <p:nvSpPr>
+          <p:cNvPr id="4" name="Rectangle 3">
+            <a:extLst>
+              <a:ext uri="{FF2B5EF4-FFF2-40B4-BE49-F238E27FC236}">
+                <a16:creationId xmlns:a16="http://schemas.microsoft.com/office/drawing/2014/main" id="{F94DC68F-D74F-CBA6-DF8E-99DB402FC877}"/>
               </a:ext>
             </a:extLst>
           </p:cNvPr>
@@ -3505,17 +3541,19 @@
         </p:nvSpPr>
         <p:spPr>
           <a:xfrm>
-            <a:off x="310512" y="378400"/>
-            <a:ext cx="6731104" cy="3780733"/>
+            <a:off x="33494135" y="27269019"/>
+            <a:ext cx="3414889" cy="686229"/>
           </a:xfrm>
           <a:prstGeom prst="rect">
             <a:avLst/>
           </a:prstGeom>
           <a:solidFill>
-            <a:srgbClr val="C5050C"/>
+            <a:schemeClr val="bg1"/>
           </a:solidFill>
           <a:ln>
-            <a:noFill/>
+            <a:solidFill>
+              <a:schemeClr val="bg1"/>
+            </a:solidFill>
           </a:ln>
           <a:effectLst/>
         </p:spPr>
@@ -3538,7 +3576,7 @@
           <a:lstStyle/>
           <a:p>
             <a:pPr algn="ctr"/>
-            <a:endParaRPr lang="en-US" sz="5016" b="1" dirty="0">
+            <a:endParaRPr lang="en-US" sz="2973" b="1" dirty="0">
               <a:solidFill>
                 <a:schemeClr val="bg1"/>
               </a:solidFill>
@@ -3550,49 +3588,10 @@
       </p:sp>
       <p:sp>
         <p:nvSpPr>
-          <p:cNvPr id="15377" name="TextBox 15376">
-            <a:extLst>
-              <a:ext uri="{FF2B5EF4-FFF2-40B4-BE49-F238E27FC236}">
-                <a16:creationId xmlns:a16="http://schemas.microsoft.com/office/drawing/2014/main" id="{6F71B1B2-8A49-474C-A9E7-25462C6514C8}"/>
-              </a:ext>
-            </a:extLst>
-          </p:cNvPr>
-          <p:cNvSpPr txBox="1"/>
-          <p:nvPr/>
-        </p:nvSpPr>
-        <p:spPr>
-          <a:xfrm>
-            <a:off x="-488414" y="28655434"/>
-            <a:ext cx="8416086" cy="680507"/>
-          </a:xfrm>
-          <a:prstGeom prst="rect">
-            <a:avLst/>
-          </a:prstGeom>
-          <a:noFill/>
-        </p:spPr>
-        <p:txBody>
-          <a:bodyPr wrap="none" rtlCol="0">
-            <a:spAutoFit/>
-          </a:bodyPr>
-          <a:lstStyle/>
-          <a:p>
-            <a:r>
-              <a:rPr lang="en-US" sz="3822" b="1" dirty="0">
-                <a:solidFill>
-                  <a:schemeClr val="bg1"/>
-                </a:solidFill>
-              </a:rPr>
-              <a:t>           ECE Capstone Open House 2024</a:t>
-            </a:r>
-          </a:p>
-        </p:txBody>
-      </p:sp>
-      <p:sp>
-        <p:nvSpPr>
-          <p:cNvPr id="4" name="Rectangle 3">
-            <a:extLst>
-              <a:ext uri="{FF2B5EF4-FFF2-40B4-BE49-F238E27FC236}">
-                <a16:creationId xmlns:a16="http://schemas.microsoft.com/office/drawing/2014/main" id="{F94DC68F-D74F-CBA6-DF8E-99DB402FC877}"/>
+          <p:cNvPr id="3" name="Rectangle 2">
+            <a:extLst>
+              <a:ext uri="{FF2B5EF4-FFF2-40B4-BE49-F238E27FC236}">
+                <a16:creationId xmlns:a16="http://schemas.microsoft.com/office/drawing/2014/main" id="{5B1873DA-91CE-364F-5CF3-E3CE3B1227BD}"/>
               </a:ext>
             </a:extLst>
           </p:cNvPr>
@@ -3601,18 +3600,18 @@
         </p:nvSpPr>
         <p:spPr>
           <a:xfrm>
-            <a:off x="33494135" y="27269019"/>
-            <a:ext cx="3414889" cy="686229"/>
-          </a:xfrm>
-          <a:prstGeom prst="rect">
-            <a:avLst/>
-          </a:prstGeom>
-          <a:solidFill>
-            <a:schemeClr val="bg1"/>
-          </a:solidFill>
-          <a:ln>
+            <a:off x="359829" y="4926627"/>
+            <a:ext cx="13231995" cy="10084052"/>
+          </a:xfrm>
+          <a:prstGeom prst="rect">
+            <a:avLst/>
+          </a:prstGeom>
+          <a:noFill/>
+          <a:ln w="38100">
             <a:solidFill>
-              <a:schemeClr val="bg1"/>
+              <a:schemeClr val="accent1">
+                <a:shade val="15000"/>
+              </a:schemeClr>
             </a:solidFill>
           </a:ln>
           <a:effectLst/>
@@ -3636,7 +3635,7 @@
           <a:lstStyle/>
           <a:p>
             <a:pPr algn="ctr"/>
-            <a:endParaRPr lang="en-US" sz="2973" b="1" dirty="0">
+            <a:endParaRPr lang="en-US" sz="3344" b="1" dirty="0">
               <a:solidFill>
                 <a:schemeClr val="bg1"/>
               </a:solidFill>
@@ -3648,10 +3647,10 @@
       </p:sp>
       <p:sp>
         <p:nvSpPr>
-          <p:cNvPr id="3" name="Rectangle 2">
-            <a:extLst>
-              <a:ext uri="{FF2B5EF4-FFF2-40B4-BE49-F238E27FC236}">
-                <a16:creationId xmlns:a16="http://schemas.microsoft.com/office/drawing/2014/main" id="{5B1873DA-91CE-364F-5CF3-E3CE3B1227BD}"/>
+          <p:cNvPr id="7" name="Rectangle 6">
+            <a:extLst>
+              <a:ext uri="{FF2B5EF4-FFF2-40B4-BE49-F238E27FC236}">
+                <a16:creationId xmlns:a16="http://schemas.microsoft.com/office/drawing/2014/main" id="{A540AA3E-571D-BCDB-D7FD-FCD22DEC3487}"/>
               </a:ext>
             </a:extLst>
           </p:cNvPr>
@@ -3660,8 +3659,8 @@
         </p:nvSpPr>
         <p:spPr>
           <a:xfrm>
-            <a:off x="359829" y="4926627"/>
-            <a:ext cx="13231995" cy="10084052"/>
+            <a:off x="13886544" y="4963151"/>
+            <a:ext cx="11840835" cy="25897847"/>
           </a:xfrm>
           <a:prstGeom prst="rect">
             <a:avLst/>
@@ -3707,10 +3706,10 @@
       </p:sp>
       <p:sp>
         <p:nvSpPr>
-          <p:cNvPr id="7" name="Rectangle 6">
-            <a:extLst>
-              <a:ext uri="{FF2B5EF4-FFF2-40B4-BE49-F238E27FC236}">
-                <a16:creationId xmlns:a16="http://schemas.microsoft.com/office/drawing/2014/main" id="{A540AA3E-571D-BCDB-D7FD-FCD22DEC3487}"/>
+          <p:cNvPr id="8" name="Rectangle 7">
+            <a:extLst>
+              <a:ext uri="{FF2B5EF4-FFF2-40B4-BE49-F238E27FC236}">
+                <a16:creationId xmlns:a16="http://schemas.microsoft.com/office/drawing/2014/main" id="{DCA60DA1-4846-5F2E-5FD1-335471465E90}"/>
               </a:ext>
             </a:extLst>
           </p:cNvPr>
@@ -3719,8 +3718,8 @@
         </p:nvSpPr>
         <p:spPr>
           <a:xfrm>
-            <a:off x="13886544" y="4963151"/>
-            <a:ext cx="11840835" cy="25897847"/>
+            <a:off x="26009361" y="4963153"/>
+            <a:ext cx="12490690" cy="12397902"/>
           </a:xfrm>
           <a:prstGeom prst="rect">
             <a:avLst/>
@@ -3766,10 +3765,10 @@
       </p:sp>
       <p:sp>
         <p:nvSpPr>
-          <p:cNvPr id="8" name="Rectangle 7">
-            <a:extLst>
-              <a:ext uri="{FF2B5EF4-FFF2-40B4-BE49-F238E27FC236}">
-                <a16:creationId xmlns:a16="http://schemas.microsoft.com/office/drawing/2014/main" id="{DCA60DA1-4846-5F2E-5FD1-335471465E90}"/>
+          <p:cNvPr id="10" name="Rectangle 9">
+            <a:extLst>
+              <a:ext uri="{FF2B5EF4-FFF2-40B4-BE49-F238E27FC236}">
+                <a16:creationId xmlns:a16="http://schemas.microsoft.com/office/drawing/2014/main" id="{8A8881E6-6CFE-401D-B218-0B3B2AC78281}"/>
               </a:ext>
             </a:extLst>
           </p:cNvPr>
@@ -3778,8 +3777,8 @@
         </p:nvSpPr>
         <p:spPr>
           <a:xfrm>
-            <a:off x="26009361" y="4963153"/>
-            <a:ext cx="12490690" cy="12397902"/>
+            <a:off x="359829" y="17642452"/>
+            <a:ext cx="13231995" cy="13218548"/>
           </a:xfrm>
           <a:prstGeom prst="rect">
             <a:avLst/>
@@ -3825,10 +3824,65 @@
       </p:sp>
       <p:sp>
         <p:nvSpPr>
-          <p:cNvPr id="10" name="Rectangle 9">
-            <a:extLst>
-              <a:ext uri="{FF2B5EF4-FFF2-40B4-BE49-F238E27FC236}">
-                <a16:creationId xmlns:a16="http://schemas.microsoft.com/office/drawing/2014/main" id="{8A8881E6-6CFE-401D-B218-0B3B2AC78281}"/>
+          <p:cNvPr id="13" name="TextBox 12">
+            <a:extLst>
+              <a:ext uri="{FF2B5EF4-FFF2-40B4-BE49-F238E27FC236}">
+                <a16:creationId xmlns:a16="http://schemas.microsoft.com/office/drawing/2014/main" id="{2F888FF4-18C1-0114-49DE-65302E796083}"/>
+              </a:ext>
+            </a:extLst>
+          </p:cNvPr>
+          <p:cNvSpPr txBox="1"/>
+          <p:nvPr/>
+        </p:nvSpPr>
+        <p:spPr>
+          <a:xfrm>
+            <a:off x="5747657" y="717029"/>
+            <a:ext cx="27634947" cy="1569660"/>
+          </a:xfrm>
+          <a:prstGeom prst="rect">
+            <a:avLst/>
+          </a:prstGeom>
+          <a:noFill/>
+        </p:spPr>
+        <p:txBody>
+          <a:bodyPr wrap="square" rtlCol="0">
+            <a:spAutoFit/>
+          </a:bodyPr>
+          <a:lstStyle/>
+          <a:p>
+            <a:pPr algn="ctr"/>
+            <a:r>
+              <a:rPr lang="en-US" sz="5400" b="1" dirty="0">
+                <a:solidFill>
+                  <a:schemeClr val="bg1"/>
+                </a:solidFill>
+                <a:latin typeface="Arial" panose="020B0604020202020204" pitchFamily="34" charset="0"/>
+                <a:cs typeface="Arial" panose="020B0604020202020204" pitchFamily="34" charset="0"/>
+              </a:rPr>
+              <a:t>ECE 554</a:t>
+            </a:r>
+          </a:p>
+          <a:p>
+            <a:pPr algn="ctr"/>
+            <a:r>
+              <a:rPr lang="en-US" sz="4200" b="1" dirty="0">
+                <a:solidFill>
+                  <a:schemeClr val="bg1"/>
+                </a:solidFill>
+                <a:latin typeface="Arial" panose="020B0604020202020204" pitchFamily="34" charset="0"/>
+                <a:cs typeface="Arial" panose="020B0604020202020204" pitchFamily="34" charset="0"/>
+              </a:rPr>
+              <a:t>School Seeker</a:t>
+            </a:r>
+          </a:p>
+        </p:txBody>
+      </p:sp>
+      <p:sp>
+        <p:nvSpPr>
+          <p:cNvPr id="14" name="Rectangle 13">
+            <a:extLst>
+              <a:ext uri="{FF2B5EF4-FFF2-40B4-BE49-F238E27FC236}">
+                <a16:creationId xmlns:a16="http://schemas.microsoft.com/office/drawing/2014/main" id="{4426050A-8698-151F-3BCA-4ACC6BBBF586}"/>
               </a:ext>
             </a:extLst>
           </p:cNvPr>
@@ -3837,19 +3891,17 @@
         </p:nvSpPr>
         <p:spPr>
           <a:xfrm>
-            <a:off x="359829" y="15385879"/>
-            <a:ext cx="13231995" cy="15475121"/>
-          </a:xfrm>
-          <a:prstGeom prst="rect">
-            <a:avLst/>
-          </a:prstGeom>
-          <a:noFill/>
-          <a:ln w="38100">
-            <a:solidFill>
-              <a:schemeClr val="accent1">
-                <a:shade val="15000"/>
-              </a:schemeClr>
-            </a:solidFill>
+            <a:off x="301252" y="442425"/>
+            <a:ext cx="5635343" cy="2376975"/>
+          </a:xfrm>
+          <a:prstGeom prst="rect">
+            <a:avLst/>
+          </a:prstGeom>
+          <a:solidFill>
+            <a:srgbClr val="C5050C"/>
+          </a:solidFill>
+          <a:ln>
+            <a:noFill/>
           </a:ln>
           <a:effectLst/>
         </p:spPr>
@@ -3872,7 +3924,7 @@
           <a:lstStyle/>
           <a:p>
             <a:pPr algn="ctr"/>
-            <a:endParaRPr lang="en-US" sz="3344" b="1" dirty="0">
+            <a:endParaRPr lang="en-US" sz="4200" b="1" dirty="0">
               <a:solidFill>
                 <a:schemeClr val="bg1"/>
               </a:solidFill>
@@ -3884,10 +3936,10 @@
       </p:sp>
       <p:sp>
         <p:nvSpPr>
-          <p:cNvPr id="13" name="TextBox 12">
-            <a:extLst>
-              <a:ext uri="{FF2B5EF4-FFF2-40B4-BE49-F238E27FC236}">
-                <a16:creationId xmlns:a16="http://schemas.microsoft.com/office/drawing/2014/main" id="{2F888FF4-18C1-0114-49DE-65302E796083}"/>
+          <p:cNvPr id="15" name="TextBox 14">
+            <a:extLst>
+              <a:ext uri="{FF2B5EF4-FFF2-40B4-BE49-F238E27FC236}">
+                <a16:creationId xmlns:a16="http://schemas.microsoft.com/office/drawing/2014/main" id="{846AA926-6438-F1E9-7339-94FB807EC0A5}"/>
               </a:ext>
             </a:extLst>
           </p:cNvPr>
@@ -3896,8 +3948,8 @@
         </p:nvSpPr>
         <p:spPr>
           <a:xfrm>
-            <a:off x="5747657" y="717029"/>
-            <a:ext cx="27634947" cy="1569660"/>
+            <a:off x="922043" y="2029607"/>
+            <a:ext cx="9467266" cy="1754326"/>
           </a:xfrm>
           <a:prstGeom prst="rect">
             <a:avLst/>
@@ -3910,7 +3962,7 @@
           </a:bodyPr>
           <a:lstStyle/>
           <a:p>
-            <a:pPr algn="ctr"/>
+            <a:pPr algn="just"/>
             <a:r>
               <a:rPr lang="en-US" sz="5400" b="1" dirty="0">
                 <a:solidFill>
@@ -3919,30 +3971,98 @@
                 <a:latin typeface="Arial" panose="020B0604020202020204" pitchFamily="34" charset="0"/>
                 <a:cs typeface="Arial" panose="020B0604020202020204" pitchFamily="34" charset="0"/>
               </a:rPr>
-              <a:t>ECE 554</a:t>
+              <a:t>Nathan Woolf</a:t>
             </a:r>
           </a:p>
           <a:p>
-            <a:pPr algn="ctr"/>
+            <a:pPr algn="just"/>
             <a:r>
-              <a:rPr lang="en-US" sz="4200" b="1" dirty="0">
+              <a:rPr lang="en-US" sz="5400" b="1" dirty="0">
                 <a:solidFill>
                   <a:schemeClr val="bg1"/>
                 </a:solidFill>
                 <a:latin typeface="Arial" panose="020B0604020202020204" pitchFamily="34" charset="0"/>
                 <a:cs typeface="Arial" panose="020B0604020202020204" pitchFamily="34" charset="0"/>
               </a:rPr>
-              <a:t>School Seeker</a:t>
+              <a:t>Harrison Doll</a:t>
             </a:r>
           </a:p>
         </p:txBody>
       </p:sp>
       <p:sp>
         <p:nvSpPr>
-          <p:cNvPr id="14" name="Rectangle 13">
-            <a:extLst>
-              <a:ext uri="{FF2B5EF4-FFF2-40B4-BE49-F238E27FC236}">
-                <a16:creationId xmlns:a16="http://schemas.microsoft.com/office/drawing/2014/main" id="{4426050A-8698-151F-3BCA-4ACC6BBBF586}"/>
+          <p:cNvPr id="16" name="TextBox 15">
+            <a:extLst>
+              <a:ext uri="{FF2B5EF4-FFF2-40B4-BE49-F238E27FC236}">
+                <a16:creationId xmlns:a16="http://schemas.microsoft.com/office/drawing/2014/main" id="{54B69820-204B-D6CF-520E-B8249621A051}"/>
+              </a:ext>
+            </a:extLst>
+          </p:cNvPr>
+          <p:cNvSpPr txBox="1"/>
+          <p:nvPr/>
+        </p:nvSpPr>
+        <p:spPr>
+          <a:xfrm>
+            <a:off x="28569974" y="1102476"/>
+            <a:ext cx="7382198" cy="2585323"/>
+          </a:xfrm>
+          <a:prstGeom prst="rect">
+            <a:avLst/>
+          </a:prstGeom>
+          <a:noFill/>
+        </p:spPr>
+        <p:txBody>
+          <a:bodyPr wrap="square" rtlCol="0">
+            <a:spAutoFit/>
+          </a:bodyPr>
+          <a:lstStyle/>
+          <a:p>
+            <a:pPr algn="r"/>
+            <a:r>
+              <a:rPr lang="en-US" sz="5400" b="1" dirty="0">
+                <a:solidFill>
+                  <a:schemeClr val="bg1"/>
+                </a:solidFill>
+                <a:latin typeface="Arial" panose="020B0604020202020204" pitchFamily="34" charset="0"/>
+                <a:cs typeface="Arial" panose="020B0604020202020204" pitchFamily="34" charset="0"/>
+              </a:rPr>
+              <a:t>Sam Cooper</a:t>
+            </a:r>
+          </a:p>
+          <a:p>
+            <a:pPr algn="r"/>
+            <a:r>
+              <a:rPr lang="en-US" sz="5400" b="1" dirty="0">
+                <a:solidFill>
+                  <a:schemeClr val="bg1"/>
+                </a:solidFill>
+                <a:latin typeface="Arial" panose="020B0604020202020204" pitchFamily="34" charset="0"/>
+                <a:cs typeface="Arial" panose="020B0604020202020204" pitchFamily="34" charset="0"/>
+              </a:rPr>
+              <a:t>Jake Neau</a:t>
+            </a:r>
+          </a:p>
+          <a:p>
+            <a:pPr algn="r"/>
+            <a:r>
+              <a:rPr lang="en-US" sz="5400" b="1" dirty="0">
+                <a:solidFill>
+                  <a:schemeClr val="bg1"/>
+                </a:solidFill>
+                <a:latin typeface="Arial" panose="020B0604020202020204" pitchFamily="34" charset="0"/>
+                <a:cs typeface="Arial" panose="020B0604020202020204" pitchFamily="34" charset="0"/>
+              </a:rPr>
+              <a:t>Cullen Krasselt</a:t>
+            </a:r>
+          </a:p>
+        </p:txBody>
+      </p:sp>
+      <p:sp>
+        <p:nvSpPr>
+          <p:cNvPr id="22" name="Rectangle 21">
+            <a:extLst>
+              <a:ext uri="{FF2B5EF4-FFF2-40B4-BE49-F238E27FC236}">
+                <a16:creationId xmlns:a16="http://schemas.microsoft.com/office/drawing/2014/main" id="{E42E89DA-2FF7-D811-34D9-1A38AFF21C40}"/>
               </a:ext>
             </a:extLst>
           </p:cNvPr>
@@ -3951,17 +4071,19 @@
         </p:nvSpPr>
         <p:spPr>
           <a:xfrm>
-            <a:off x="301252" y="442425"/>
-            <a:ext cx="5635343" cy="2376975"/>
-          </a:xfrm>
-          <a:prstGeom prst="rect">
-            <a:avLst/>
-          </a:prstGeom>
-          <a:solidFill>
-            <a:srgbClr val="C5050C"/>
-          </a:solidFill>
-          <a:ln>
-            <a:noFill/>
+            <a:off x="26009360" y="17642452"/>
+            <a:ext cx="12490690" cy="13218546"/>
+          </a:xfrm>
+          <a:prstGeom prst="rect">
+            <a:avLst/>
+          </a:prstGeom>
+          <a:noFill/>
+          <a:ln w="38100">
+            <a:solidFill>
+              <a:schemeClr val="accent1">
+                <a:shade val="15000"/>
+              </a:schemeClr>
+            </a:solidFill>
           </a:ln>
           <a:effectLst/>
         </p:spPr>
@@ -3984,188 +4106,6 @@
           <a:lstStyle/>
           <a:p>
             <a:pPr algn="ctr"/>
-            <a:endParaRPr lang="en-US" sz="4200" b="1" dirty="0">
-              <a:solidFill>
-                <a:schemeClr val="bg1"/>
-              </a:solidFill>
-              <a:latin typeface="Arial" panose="020B0604020202020204" pitchFamily="34" charset="0"/>
-              <a:cs typeface="Arial" panose="020B0604020202020204" pitchFamily="34" charset="0"/>
-            </a:endParaRPr>
-          </a:p>
-        </p:txBody>
-      </p:sp>
-      <p:sp>
-        <p:nvSpPr>
-          <p:cNvPr id="15" name="TextBox 14">
-            <a:extLst>
-              <a:ext uri="{FF2B5EF4-FFF2-40B4-BE49-F238E27FC236}">
-                <a16:creationId xmlns:a16="http://schemas.microsoft.com/office/drawing/2014/main" id="{846AA926-6438-F1E9-7339-94FB807EC0A5}"/>
-              </a:ext>
-            </a:extLst>
-          </p:cNvPr>
-          <p:cNvSpPr txBox="1"/>
-          <p:nvPr/>
-        </p:nvSpPr>
-        <p:spPr>
-          <a:xfrm>
-            <a:off x="922043" y="2029607"/>
-            <a:ext cx="9467266" cy="1754326"/>
-          </a:xfrm>
-          <a:prstGeom prst="rect">
-            <a:avLst/>
-          </a:prstGeom>
-          <a:noFill/>
-        </p:spPr>
-        <p:txBody>
-          <a:bodyPr wrap="square" rtlCol="0">
-            <a:spAutoFit/>
-          </a:bodyPr>
-          <a:lstStyle/>
-          <a:p>
-            <a:pPr algn="just"/>
-            <a:r>
-              <a:rPr lang="en-US" sz="5400" b="1" dirty="0">
-                <a:solidFill>
-                  <a:schemeClr val="bg1"/>
-                </a:solidFill>
-                <a:latin typeface="Arial" panose="020B0604020202020204" pitchFamily="34" charset="0"/>
-                <a:cs typeface="Arial" panose="020B0604020202020204" pitchFamily="34" charset="0"/>
-              </a:rPr>
-              <a:t>Nathan Woolf</a:t>
-            </a:r>
-          </a:p>
-          <a:p>
-            <a:pPr algn="just"/>
-            <a:r>
-              <a:rPr lang="en-US" sz="5400" b="1" dirty="0">
-                <a:solidFill>
-                  <a:schemeClr val="bg1"/>
-                </a:solidFill>
-                <a:latin typeface="Arial" panose="020B0604020202020204" pitchFamily="34" charset="0"/>
-                <a:cs typeface="Arial" panose="020B0604020202020204" pitchFamily="34" charset="0"/>
-              </a:rPr>
-              <a:t>Harrison Doll</a:t>
-            </a:r>
-          </a:p>
-        </p:txBody>
-      </p:sp>
-      <p:sp>
-        <p:nvSpPr>
-          <p:cNvPr id="16" name="TextBox 15">
-            <a:extLst>
-              <a:ext uri="{FF2B5EF4-FFF2-40B4-BE49-F238E27FC236}">
-                <a16:creationId xmlns:a16="http://schemas.microsoft.com/office/drawing/2014/main" id="{54B69820-204B-D6CF-520E-B8249621A051}"/>
-              </a:ext>
-            </a:extLst>
-          </p:cNvPr>
-          <p:cNvSpPr txBox="1"/>
-          <p:nvPr/>
-        </p:nvSpPr>
-        <p:spPr>
-          <a:xfrm>
-            <a:off x="28569974" y="1102476"/>
-            <a:ext cx="7382198" cy="2585323"/>
-          </a:xfrm>
-          <a:prstGeom prst="rect">
-            <a:avLst/>
-          </a:prstGeom>
-          <a:noFill/>
-        </p:spPr>
-        <p:txBody>
-          <a:bodyPr wrap="square" rtlCol="0">
-            <a:spAutoFit/>
-          </a:bodyPr>
-          <a:lstStyle/>
-          <a:p>
-            <a:pPr algn="r"/>
-            <a:r>
-              <a:rPr lang="en-US" sz="5400" b="1" dirty="0">
-                <a:solidFill>
-                  <a:schemeClr val="bg1"/>
-                </a:solidFill>
-                <a:latin typeface="Arial" panose="020B0604020202020204" pitchFamily="34" charset="0"/>
-                <a:cs typeface="Arial" panose="020B0604020202020204" pitchFamily="34" charset="0"/>
-              </a:rPr>
-              <a:t>Sam Cooper</a:t>
-            </a:r>
-          </a:p>
-          <a:p>
-            <a:pPr algn="r"/>
-            <a:r>
-              <a:rPr lang="en-US" sz="5400" b="1" dirty="0">
-                <a:solidFill>
-                  <a:schemeClr val="bg1"/>
-                </a:solidFill>
-                <a:latin typeface="Arial" panose="020B0604020202020204" pitchFamily="34" charset="0"/>
-                <a:cs typeface="Arial" panose="020B0604020202020204" pitchFamily="34" charset="0"/>
-              </a:rPr>
-              <a:t>Jake Neau</a:t>
-            </a:r>
-          </a:p>
-          <a:p>
-            <a:pPr algn="r"/>
-            <a:r>
-              <a:rPr lang="en-US" sz="5400" b="1" dirty="0">
-                <a:solidFill>
-                  <a:schemeClr val="bg1"/>
-                </a:solidFill>
-                <a:latin typeface="Arial" panose="020B0604020202020204" pitchFamily="34" charset="0"/>
-                <a:cs typeface="Arial" panose="020B0604020202020204" pitchFamily="34" charset="0"/>
-              </a:rPr>
-              <a:t>Cullen Krasselt</a:t>
-            </a:r>
-          </a:p>
-        </p:txBody>
-      </p:sp>
-      <p:sp>
-        <p:nvSpPr>
-          <p:cNvPr id="22" name="Rectangle 21">
-            <a:extLst>
-              <a:ext uri="{FF2B5EF4-FFF2-40B4-BE49-F238E27FC236}">
-                <a16:creationId xmlns:a16="http://schemas.microsoft.com/office/drawing/2014/main" id="{E42E89DA-2FF7-D811-34D9-1A38AFF21C40}"/>
-              </a:ext>
-            </a:extLst>
-          </p:cNvPr>
-          <p:cNvSpPr/>
-          <p:nvPr/>
-        </p:nvSpPr>
-        <p:spPr>
-          <a:xfrm>
-            <a:off x="26009360" y="17642452"/>
-            <a:ext cx="12490690" cy="13218546"/>
-          </a:xfrm>
-          <a:prstGeom prst="rect">
-            <a:avLst/>
-          </a:prstGeom>
-          <a:noFill/>
-          <a:ln w="38100">
-            <a:solidFill>
-              <a:schemeClr val="accent1">
-                <a:shade val="15000"/>
-              </a:schemeClr>
-            </a:solidFill>
-          </a:ln>
-          <a:effectLst/>
-        </p:spPr>
-        <p:style>
-          <a:lnRef idx="1">
-            <a:schemeClr val="accent1"/>
-          </a:lnRef>
-          <a:fillRef idx="3">
-            <a:schemeClr val="accent1"/>
-          </a:fillRef>
-          <a:effectRef idx="2">
-            <a:schemeClr val="accent1"/>
-          </a:effectRef>
-          <a:fontRef idx="minor">
-            <a:schemeClr val="lt1"/>
-          </a:fontRef>
-        </p:style>
-        <p:txBody>
-          <a:bodyPr rtlCol="0" anchor="ctr"/>
-          <a:lstStyle/>
-          <a:p>
-            <a:pPr algn="ctr"/>
             <a:endParaRPr lang="en-US" sz="3344" b="1" dirty="0">
               <a:solidFill>
                 <a:schemeClr val="bg1"/>
@@ -4331,8 +4271,8 @@
           </a:p>
         </p:txBody>
       </p:sp>
-      <mc:AlternateContent xmlns:mc="http://schemas.openxmlformats.org/markup-compatibility/2006" xmlns:a14="http://schemas.microsoft.com/office/drawing/2010/main">
-        <mc:Choice Requires="a14">
+      <mc:AlternateContent xmlns:mc="http://schemas.openxmlformats.org/markup-compatibility/2006">
+        <mc:Choice xmlns:a14="http://schemas.microsoft.com/office/drawing/2010/main" Requires="a14">
           <p:sp>
             <p:nvSpPr>
               <p:cNvPr id="42" name="TextBox 41">
@@ -4394,7 +4334,7 @@
             </p:txBody>
           </p:sp>
         </mc:Choice>
-        <mc:Fallback xmlns="">
+        <mc:Fallback>
           <p:sp>
             <p:nvSpPr>
               <p:cNvPr id="42" name="TextBox 41">
@@ -4420,7 +4360,7 @@
               <a:blipFill>
                 <a:blip r:embed="rId5"/>
                 <a:stretch>
-                  <a:fillRect b="-25641"/>
+                  <a:fillRect/>
                 </a:stretch>
               </a:blipFill>
             </p:spPr>
@@ -5203,6 +5143,829 @@
           </a:p>
         </p:txBody>
       </p:sp>
+      <p:sp>
+        <p:nvSpPr>
+          <p:cNvPr id="5" name="TextBox 4">
+            <a:extLst>
+              <a:ext uri="{FF2B5EF4-FFF2-40B4-BE49-F238E27FC236}">
+                <a16:creationId xmlns:a16="http://schemas.microsoft.com/office/drawing/2014/main" id="{8A9D96D7-A300-005A-4C1F-7AEC3E829411}"/>
+              </a:ext>
+            </a:extLst>
+          </p:cNvPr>
+          <p:cNvSpPr txBox="1"/>
+          <p:nvPr/>
+        </p:nvSpPr>
+        <p:spPr>
+          <a:xfrm>
+            <a:off x="653722" y="19234239"/>
+            <a:ext cx="6051878" cy="6064161"/>
+          </a:xfrm>
+          <a:prstGeom prst="rect">
+            <a:avLst/>
+          </a:prstGeom>
+          <a:noFill/>
+        </p:spPr>
+        <p:txBody>
+          <a:bodyPr wrap="square" rtlCol="0">
+            <a:spAutoFit/>
+          </a:bodyPr>
+          <a:lstStyle/>
+          <a:p>
+            <a:r>
+              <a:rPr lang="en-US" dirty="0"/>
+              <a:t>The project required a translation from Cartesian coordinates on the camera to spherical coordinates to drive the servos. However, trigonometric functions are hardware intensive and require a series expansion to approximate their values, which is inefficient on an FPGA. To reduce resource usage and improve speed, we approximated the angles by treating the x and y coordinates independently. This simplification allowed us to apply the small angle approximation, where tan(θ) ≈ θ, effectively eliminating the need for any trigonometric operations. The evolution of these equations is shown to the right.</a:t>
+            </a:r>
+          </a:p>
+        </p:txBody>
+      </p:sp>
+      <p:sp>
+        <p:nvSpPr>
+          <p:cNvPr id="19" name="Rectangle 3">
+            <a:extLst>
+              <a:ext uri="{FF2B5EF4-FFF2-40B4-BE49-F238E27FC236}">
+                <a16:creationId xmlns:a16="http://schemas.microsoft.com/office/drawing/2014/main" id="{1A417D0C-B98A-BE27-4ABF-AC3008F343BB}"/>
+              </a:ext>
+            </a:extLst>
+          </p:cNvPr>
+          <p:cNvSpPr>
+            <a:spLocks noChangeArrowheads="1"/>
+          </p:cNvSpPr>
+          <p:nvPr/>
+        </p:nvSpPr>
+        <p:spPr bwMode="auto">
+          <a:xfrm>
+            <a:off x="0" y="0"/>
+            <a:ext cx="39319200" cy="457200"/>
+          </a:xfrm>
+          <a:prstGeom prst="rect">
+            <a:avLst/>
+          </a:prstGeom>
+          <a:noFill/>
+          <a:ln>
+            <a:noFill/>
+          </a:ln>
+          <a:effectLst/>
+          <a:extLst>
+            <a:ext uri="{909E8E84-426E-40DD-AFC4-6F175D3DCCD1}">
+              <a14:hiddenFill xmlns:a14="http://schemas.microsoft.com/office/drawing/2010/main">
+                <a:solidFill>
+                  <a:schemeClr val="accent1"/>
+                </a:solidFill>
+              </a14:hiddenFill>
+            </a:ext>
+            <a:ext uri="{91240B29-F687-4F45-9708-019B960494DF}">
+              <a14:hiddenLine xmlns:a14="http://schemas.microsoft.com/office/drawing/2010/main" w="9525">
+                <a:solidFill>
+                  <a:schemeClr val="tx1"/>
+                </a:solidFill>
+                <a:miter lim="800000"/>
+                <a:headEnd/>
+                <a:tailEnd/>
+              </a14:hiddenLine>
+            </a:ext>
+            <a:ext uri="{AF507438-7753-43E0-B8FC-AC1667EBCBE1}">
+              <a14:hiddenEffects xmlns:a14="http://schemas.microsoft.com/office/drawing/2010/main">
+                <a:effectLst>
+                  <a:outerShdw dist="35921" dir="2700000" algn="ctr" rotWithShape="0">
+                    <a:schemeClr val="bg2"/>
+                  </a:outerShdw>
+                </a:effectLst>
+              </a14:hiddenEffects>
+            </a:ext>
+          </a:extLst>
+        </p:spPr>
+        <p:txBody>
+          <a:bodyPr vert="horz" wrap="none" lIns="91440" tIns="45720" rIns="91440" bIns="45720" numCol="1" anchor="ctr" anchorCtr="0" compatLnSpc="1">
+            <a:prstTxWarp prst="textNoShape">
+              <a:avLst/>
+            </a:prstTxWarp>
+            <a:spAutoFit/>
+          </a:bodyPr>
+          <a:lstStyle/>
+          <a:p>
+            <a:pPr marL="0" marR="0" lvl="0" indent="0" algn="l" defTabSz="914400" rtl="0" eaLnBrk="0" fontAlgn="base" latinLnBrk="0" hangingPunct="0">
+              <a:lnSpc>
+                <a:spcPct val="100000"/>
+              </a:lnSpc>
+              <a:spcBef>
+                <a:spcPct val="0"/>
+              </a:spcBef>
+              <a:spcAft>
+                <a:spcPct val="0"/>
+              </a:spcAft>
+              <a:buClrTx/>
+              <a:buSzTx/>
+              <a:buFontTx/>
+              <a:buNone/>
+              <a:tabLst/>
+            </a:pPr>
+            <a:r>
+              <a:rPr kumimoji="0" lang="en-US" altLang="en-US" sz="1800" b="0" i="0" u="none" strike="noStrike" cap="none" normalizeH="0" baseline="0">
+                <a:ln>
+                  <a:noFill/>
+                </a:ln>
+                <a:solidFill>
+                  <a:schemeClr val="tx1"/>
+                </a:solidFill>
+                <a:effectLst/>
+                <a:latin typeface="Arial" panose="020B0604020202020204" pitchFamily="34" charset="0"/>
+              </a:rPr>
+              <a:t>Instead of passing angles between modules, we sent the number of microseconds directly to the servo driver. This offered finer control, with a resolution of 0.18 degrees per microsecond, and avoided the complexity of handling fixed-point numbers across modules. Our decision was supported by a heatmap of target positions, which showed most activity near the center, validating the small angle and linear control assumptions.</a:t>
+            </a:r>
+          </a:p>
+          <a:p>
+            <a:pPr marL="0" marR="0" lvl="0" indent="0" algn="l" defTabSz="914400" rtl="0" eaLnBrk="0" fontAlgn="base" latinLnBrk="0" hangingPunct="0">
+              <a:lnSpc>
+                <a:spcPct val="100000"/>
+              </a:lnSpc>
+              <a:spcBef>
+                <a:spcPct val="0"/>
+              </a:spcBef>
+              <a:spcAft>
+                <a:spcPct val="0"/>
+              </a:spcAft>
+              <a:buClrTx/>
+              <a:buSzTx/>
+              <a:buFontTx/>
+              <a:buNone/>
+              <a:tabLst/>
+            </a:pPr>
+            <a:endParaRPr kumimoji="0" lang="en-US" altLang="en-US" sz="1800" b="0" i="0" u="none" strike="noStrike" cap="none" normalizeH="0" baseline="0">
+              <a:ln>
+                <a:noFill/>
+              </a:ln>
+              <a:solidFill>
+                <a:schemeClr val="tx1"/>
+              </a:solidFill>
+              <a:effectLst/>
+              <a:latin typeface="Arial" panose="020B0604020202020204" pitchFamily="34" charset="0"/>
+            </a:endParaRPr>
+          </a:p>
+        </p:txBody>
+      </p:sp>
+      <p:sp>
+        <p:nvSpPr>
+          <p:cNvPr id="23" name="Rectangle 4">
+            <a:extLst>
+              <a:ext uri="{FF2B5EF4-FFF2-40B4-BE49-F238E27FC236}">
+                <a16:creationId xmlns:a16="http://schemas.microsoft.com/office/drawing/2014/main" id="{DC2B37EA-7AF4-8501-BE09-7C1DCC4965FA}"/>
+              </a:ext>
+            </a:extLst>
+          </p:cNvPr>
+          <p:cNvSpPr>
+            <a:spLocks noChangeArrowheads="1"/>
+          </p:cNvSpPr>
+          <p:nvPr/>
+        </p:nvSpPr>
+        <p:spPr bwMode="auto">
+          <a:xfrm>
+            <a:off x="152400" y="152400"/>
+            <a:ext cx="39319200" cy="457200"/>
+          </a:xfrm>
+          <a:prstGeom prst="rect">
+            <a:avLst/>
+          </a:prstGeom>
+          <a:noFill/>
+          <a:ln>
+            <a:noFill/>
+          </a:ln>
+          <a:effectLst/>
+          <a:extLst>
+            <a:ext uri="{909E8E84-426E-40DD-AFC4-6F175D3DCCD1}">
+              <a14:hiddenFill xmlns:a14="http://schemas.microsoft.com/office/drawing/2010/main">
+                <a:solidFill>
+                  <a:schemeClr val="accent1"/>
+                </a:solidFill>
+              </a14:hiddenFill>
+            </a:ext>
+            <a:ext uri="{91240B29-F687-4F45-9708-019B960494DF}">
+              <a14:hiddenLine xmlns:a14="http://schemas.microsoft.com/office/drawing/2010/main" w="9525">
+                <a:solidFill>
+                  <a:schemeClr val="tx1"/>
+                </a:solidFill>
+                <a:miter lim="800000"/>
+                <a:headEnd/>
+                <a:tailEnd/>
+              </a14:hiddenLine>
+            </a:ext>
+            <a:ext uri="{AF507438-7753-43E0-B8FC-AC1667EBCBE1}">
+              <a14:hiddenEffects xmlns:a14="http://schemas.microsoft.com/office/drawing/2010/main">
+                <a:effectLst>
+                  <a:outerShdw dist="35921" dir="2700000" algn="ctr" rotWithShape="0">
+                    <a:schemeClr val="bg2"/>
+                  </a:outerShdw>
+                </a:effectLst>
+              </a14:hiddenEffects>
+            </a:ext>
+          </a:extLst>
+        </p:spPr>
+        <p:txBody>
+          <a:bodyPr vert="horz" wrap="none" lIns="91440" tIns="45720" rIns="91440" bIns="45720" numCol="1" anchor="ctr" anchorCtr="0" compatLnSpc="1">
+            <a:prstTxWarp prst="textNoShape">
+              <a:avLst/>
+            </a:prstTxWarp>
+            <a:spAutoFit/>
+          </a:bodyPr>
+          <a:lstStyle/>
+          <a:p>
+            <a:pPr marL="0" marR="0" lvl="0" indent="0" algn="l" defTabSz="914400" rtl="0" eaLnBrk="0" fontAlgn="base" latinLnBrk="0" hangingPunct="0">
+              <a:lnSpc>
+                <a:spcPct val="100000"/>
+              </a:lnSpc>
+              <a:spcBef>
+                <a:spcPct val="0"/>
+              </a:spcBef>
+              <a:spcAft>
+                <a:spcPct val="0"/>
+              </a:spcAft>
+              <a:buClrTx/>
+              <a:buSzTx/>
+              <a:buFontTx/>
+              <a:buNone/>
+              <a:tabLst/>
+            </a:pPr>
+            <a:r>
+              <a:rPr kumimoji="0" lang="en-US" altLang="en-US" sz="1800" b="0" i="0" u="none" strike="noStrike" cap="none" normalizeH="0" baseline="0">
+                <a:ln>
+                  <a:noFill/>
+                </a:ln>
+                <a:solidFill>
+                  <a:schemeClr val="tx1"/>
+                </a:solidFill>
+                <a:effectLst/>
+                <a:latin typeface="Arial" panose="020B0604020202020204" pitchFamily="34" charset="0"/>
+              </a:rPr>
+              <a:t>Instead of passing angles between modules, we sent the number of microseconds directly to the servo driver. This offered finer control, with a resolution of 0.18 degrees per microsecond, and avoided the complexity of handling fixed-point numbers across modules. Our decision was supported by a heatmap of target positions, which showed most activity near the center, validating the small angle and linear control assumptions.</a:t>
+            </a:r>
+          </a:p>
+          <a:p>
+            <a:pPr marL="0" marR="0" lvl="0" indent="0" algn="l" defTabSz="914400" rtl="0" eaLnBrk="0" fontAlgn="base" latinLnBrk="0" hangingPunct="0">
+              <a:lnSpc>
+                <a:spcPct val="100000"/>
+              </a:lnSpc>
+              <a:spcBef>
+                <a:spcPct val="0"/>
+              </a:spcBef>
+              <a:spcAft>
+                <a:spcPct val="0"/>
+              </a:spcAft>
+              <a:buClrTx/>
+              <a:buSzTx/>
+              <a:buFontTx/>
+              <a:buNone/>
+              <a:tabLst/>
+            </a:pPr>
+            <a:endParaRPr kumimoji="0" lang="en-US" altLang="en-US" sz="1800" b="0" i="0" u="none" strike="noStrike" cap="none" normalizeH="0" baseline="0">
+              <a:ln>
+                <a:noFill/>
+              </a:ln>
+              <a:solidFill>
+                <a:schemeClr val="tx1"/>
+              </a:solidFill>
+              <a:effectLst/>
+              <a:latin typeface="Arial" panose="020B0604020202020204" pitchFamily="34" charset="0"/>
+            </a:endParaRPr>
+          </a:p>
+        </p:txBody>
+      </p:sp>
+      <p:sp>
+        <p:nvSpPr>
+          <p:cNvPr id="28" name="TextBox 27">
+            <a:extLst>
+              <a:ext uri="{FF2B5EF4-FFF2-40B4-BE49-F238E27FC236}">
+                <a16:creationId xmlns:a16="http://schemas.microsoft.com/office/drawing/2014/main" id="{8A6975CF-3CE0-EC2E-B816-C8D7880C88EE}"/>
+              </a:ext>
+            </a:extLst>
+          </p:cNvPr>
+          <p:cNvSpPr txBox="1"/>
+          <p:nvPr/>
+        </p:nvSpPr>
+        <p:spPr>
+          <a:xfrm>
+            <a:off x="7801212" y="25321289"/>
+            <a:ext cx="5176193" cy="5267917"/>
+          </a:xfrm>
+          <a:prstGeom prst="rect">
+            <a:avLst/>
+          </a:prstGeom>
+          <a:noFill/>
+        </p:spPr>
+        <p:txBody>
+          <a:bodyPr wrap="square" rtlCol="0">
+            <a:spAutoFit/>
+          </a:bodyPr>
+          <a:lstStyle/>
+          <a:p>
+            <a:r>
+              <a:rPr lang="en-US" dirty="0"/>
+              <a:t>To validate this approach, we generated a heatmap that visualizes the error introduced by the approximation. The results show that the primary source of error occurs near the corners of the camera frame, while most target positions along the axes and near the center remain close to the true values. This confirmed that our method was both accurate enough for our application, and that the improvements in efficiency were worth the losses in accuracy.</a:t>
+            </a:r>
+          </a:p>
+        </p:txBody>
+      </p:sp>
+      <p:sp>
+        <p:nvSpPr>
+          <p:cNvPr id="43" name="Rectangle 5">
+            <a:extLst>
+              <a:ext uri="{FF2B5EF4-FFF2-40B4-BE49-F238E27FC236}">
+                <a16:creationId xmlns:a16="http://schemas.microsoft.com/office/drawing/2014/main" id="{ECD53C57-94CF-0577-258F-466521D32525}"/>
+              </a:ext>
+            </a:extLst>
+          </p:cNvPr>
+          <p:cNvSpPr>
+            <a:spLocks noChangeArrowheads="1"/>
+          </p:cNvSpPr>
+          <p:nvPr/>
+        </p:nvSpPr>
+        <p:spPr bwMode="auto">
+          <a:xfrm>
+            <a:off x="304800" y="304800"/>
+            <a:ext cx="39319200" cy="457200"/>
+          </a:xfrm>
+          <a:prstGeom prst="rect">
+            <a:avLst/>
+          </a:prstGeom>
+          <a:noFill/>
+          <a:ln>
+            <a:noFill/>
+          </a:ln>
+          <a:effectLst/>
+          <a:extLst>
+            <a:ext uri="{909E8E84-426E-40DD-AFC4-6F175D3DCCD1}">
+              <a14:hiddenFill xmlns:a14="http://schemas.microsoft.com/office/drawing/2010/main">
+                <a:solidFill>
+                  <a:schemeClr val="accent1"/>
+                </a:solidFill>
+              </a14:hiddenFill>
+            </a:ext>
+            <a:ext uri="{91240B29-F687-4F45-9708-019B960494DF}">
+              <a14:hiddenLine xmlns:a14="http://schemas.microsoft.com/office/drawing/2010/main" w="9525">
+                <a:solidFill>
+                  <a:schemeClr val="tx1"/>
+                </a:solidFill>
+                <a:miter lim="800000"/>
+                <a:headEnd/>
+                <a:tailEnd/>
+              </a14:hiddenLine>
+            </a:ext>
+            <a:ext uri="{AF507438-7753-43E0-B8FC-AC1667EBCBE1}">
+              <a14:hiddenEffects xmlns:a14="http://schemas.microsoft.com/office/drawing/2010/main">
+                <a:effectLst>
+                  <a:outerShdw dist="35921" dir="2700000" algn="ctr" rotWithShape="0">
+                    <a:schemeClr val="bg2"/>
+                  </a:outerShdw>
+                </a:effectLst>
+              </a14:hiddenEffects>
+            </a:ext>
+          </a:extLst>
+        </p:spPr>
+        <p:txBody>
+          <a:bodyPr vert="horz" wrap="none" lIns="91440" tIns="45720" rIns="91440" bIns="45720" numCol="1" anchor="ctr" anchorCtr="0" compatLnSpc="1">
+            <a:prstTxWarp prst="textNoShape">
+              <a:avLst/>
+            </a:prstTxWarp>
+            <a:spAutoFit/>
+          </a:bodyPr>
+          <a:lstStyle/>
+          <a:p>
+            <a:pPr marL="0" marR="0" lvl="0" indent="0" algn="l" defTabSz="914400" rtl="0" eaLnBrk="0" fontAlgn="base" latinLnBrk="0" hangingPunct="0">
+              <a:lnSpc>
+                <a:spcPct val="100000"/>
+              </a:lnSpc>
+              <a:spcBef>
+                <a:spcPct val="0"/>
+              </a:spcBef>
+              <a:spcAft>
+                <a:spcPct val="0"/>
+              </a:spcAft>
+              <a:buClrTx/>
+              <a:buSzTx/>
+              <a:buFontTx/>
+              <a:buNone/>
+              <a:tabLst/>
+            </a:pPr>
+            <a:r>
+              <a:rPr kumimoji="0" lang="en-US" altLang="en-US" sz="1800" b="0" i="0" u="none" strike="noStrike" cap="none" normalizeH="0" baseline="0">
+                <a:ln>
+                  <a:noFill/>
+                </a:ln>
+                <a:solidFill>
+                  <a:schemeClr val="tx1"/>
+                </a:solidFill>
+                <a:effectLst/>
+                <a:latin typeface="Arial" panose="020B0604020202020204" pitchFamily="34" charset="0"/>
+              </a:rPr>
+              <a:t>To validate this approach, we generated a heatmap that visualizes the error introduced by the approximation. The results show that the primary source of error occurs only near the corners of the camera frame, while most target positions remain close to the center, where the approximation holds well. This confirmed that our method was both efficient and accurate enough for our application.</a:t>
+            </a:r>
+          </a:p>
+          <a:p>
+            <a:pPr marL="0" marR="0" lvl="0" indent="0" algn="l" defTabSz="914400" rtl="0" eaLnBrk="0" fontAlgn="base" latinLnBrk="0" hangingPunct="0">
+              <a:lnSpc>
+                <a:spcPct val="100000"/>
+              </a:lnSpc>
+              <a:spcBef>
+                <a:spcPct val="0"/>
+              </a:spcBef>
+              <a:spcAft>
+                <a:spcPct val="0"/>
+              </a:spcAft>
+              <a:buClrTx/>
+              <a:buSzTx/>
+              <a:buFontTx/>
+              <a:buNone/>
+              <a:tabLst/>
+            </a:pPr>
+            <a:endParaRPr kumimoji="0" lang="en-US" altLang="en-US" sz="1800" b="0" i="0" u="none" strike="noStrike" cap="none" normalizeH="0" baseline="0">
+              <a:ln>
+                <a:noFill/>
+              </a:ln>
+              <a:solidFill>
+                <a:schemeClr val="tx1"/>
+              </a:solidFill>
+              <a:effectLst/>
+              <a:latin typeface="Arial" panose="020B0604020202020204" pitchFamily="34" charset="0"/>
+            </a:endParaRPr>
+          </a:p>
+        </p:txBody>
+      </p:sp>
+      <p:pic>
+        <p:nvPicPr>
+          <p:cNvPr id="55" name="Picture 54">
+            <a:extLst>
+              <a:ext uri="{FF2B5EF4-FFF2-40B4-BE49-F238E27FC236}">
+                <a16:creationId xmlns:a16="http://schemas.microsoft.com/office/drawing/2014/main" id="{94F19014-E5D1-B577-2C4F-173CF040A61D}"/>
+              </a:ext>
+            </a:extLst>
+          </p:cNvPr>
+          <p:cNvPicPr>
+            <a:picLocks noChangeAspect="1"/>
+          </p:cNvPicPr>
+          <p:nvPr/>
+        </p:nvPicPr>
+        <p:blipFill>
+          <a:blip r:embed="rId12"/>
+          <a:stretch>
+            <a:fillRect/>
+          </a:stretch>
+        </p:blipFill>
+        <p:spPr>
+          <a:xfrm>
+            <a:off x="457200" y="25222200"/>
+            <a:ext cx="6637349" cy="5446596"/>
+          </a:xfrm>
+          <a:prstGeom prst="rect">
+            <a:avLst/>
+          </a:prstGeom>
+        </p:spPr>
+      </p:pic>
+      <p:sp>
+        <p:nvSpPr>
+          <p:cNvPr id="56" name="Rectangle 55">
+            <a:extLst>
+              <a:ext uri="{FF2B5EF4-FFF2-40B4-BE49-F238E27FC236}">
+                <a16:creationId xmlns:a16="http://schemas.microsoft.com/office/drawing/2014/main" id="{6CE0BC3A-1C4C-F134-FEA6-97E9CC6101A2}"/>
+              </a:ext>
+            </a:extLst>
+          </p:cNvPr>
+          <p:cNvSpPr/>
+          <p:nvPr/>
+        </p:nvSpPr>
+        <p:spPr>
+          <a:xfrm>
+            <a:off x="359829" y="17668006"/>
+            <a:ext cx="13223137" cy="1381994"/>
+          </a:xfrm>
+          <a:prstGeom prst="rect">
+            <a:avLst/>
+          </a:prstGeom>
+          <a:solidFill>
+            <a:srgbClr val="C5050C"/>
+          </a:solidFill>
+          <a:ln>
+            <a:noFill/>
+          </a:ln>
+          <a:effectLst/>
+        </p:spPr>
+        <p:style>
+          <a:lnRef idx="1">
+            <a:schemeClr val="accent1"/>
+          </a:lnRef>
+          <a:fillRef idx="3">
+            <a:schemeClr val="accent1"/>
+          </a:fillRef>
+          <a:effectRef idx="2">
+            <a:schemeClr val="accent1"/>
+          </a:effectRef>
+          <a:fontRef idx="minor">
+            <a:schemeClr val="lt1"/>
+          </a:fontRef>
+        </p:style>
+        <p:txBody>
+          <a:bodyPr rtlCol="0" anchor="ctr"/>
+          <a:lstStyle/>
+          <a:p>
+            <a:pPr algn="ctr"/>
+            <a:r>
+              <a:rPr lang="en-US" sz="5733" b="1" dirty="0">
+                <a:solidFill>
+                  <a:schemeClr val="bg1"/>
+                </a:solidFill>
+                <a:latin typeface="Arial" panose="020B0604020202020204" pitchFamily="34" charset="0"/>
+                <a:cs typeface="Arial" panose="020B0604020202020204" pitchFamily="34" charset="0"/>
+              </a:rPr>
+              <a:t>Translation Layer</a:t>
+            </a:r>
+          </a:p>
+        </p:txBody>
+      </p:sp>
+      <p:pic>
+        <p:nvPicPr>
+          <p:cNvPr id="1031" name="Picture 7">
+            <a:hlinkClick r:id="rId13"/>
+            <a:extLst>
+              <a:ext uri="{FF2B5EF4-FFF2-40B4-BE49-F238E27FC236}">
+                <a16:creationId xmlns:a16="http://schemas.microsoft.com/office/drawing/2014/main" id="{14EA54AC-E1CC-F57C-F69E-964479308610}"/>
+              </a:ext>
+            </a:extLst>
+          </p:cNvPr>
+          <p:cNvPicPr>
+            <a:picLocks noChangeAspect="1" noChangeArrowheads="1"/>
+          </p:cNvPicPr>
+          <p:nvPr/>
+        </p:nvPicPr>
+        <p:blipFill>
+          <a:blip r:embed="rId14">
+            <a:extLst>
+              <a:ext uri="{28A0092B-C50C-407E-A947-70E740481C1C}">
+                <a14:useLocalDpi xmlns:a14="http://schemas.microsoft.com/office/drawing/2010/main" val="0"/>
+              </a:ext>
+            </a:extLst>
+          </a:blip>
+          <a:srcRect/>
+          <a:stretch>
+            <a:fillRect/>
+          </a:stretch>
+        </p:blipFill>
+        <p:spPr bwMode="auto">
+          <a:xfrm>
+            <a:off x="7373494" y="19202400"/>
+            <a:ext cx="5624693" cy="997402"/>
+          </a:xfrm>
+          <a:prstGeom prst="rect">
+            <a:avLst/>
+          </a:prstGeom>
+          <a:noFill/>
+          <a:extLst>
+            <a:ext uri="{909E8E84-426E-40DD-AFC4-6F175D3DCCD1}">
+              <a14:hiddenFill xmlns:a14="http://schemas.microsoft.com/office/drawing/2010/main">
+                <a:solidFill>
+                  <a:srgbClr val="FFFFFF"/>
+                </a:solidFill>
+              </a14:hiddenFill>
+            </a:ext>
+          </a:extLst>
+        </p:spPr>
+      </p:pic>
+      <p:pic>
+        <p:nvPicPr>
+          <p:cNvPr id="1033" name="Picture 9">
+            <a:hlinkClick r:id="rId15"/>
+            <a:extLst>
+              <a:ext uri="{FF2B5EF4-FFF2-40B4-BE49-F238E27FC236}">
+                <a16:creationId xmlns:a16="http://schemas.microsoft.com/office/drawing/2014/main" id="{F813A8CE-FCDE-9E2B-7AA1-8518961D85C7}"/>
+              </a:ext>
+            </a:extLst>
+          </p:cNvPr>
+          <p:cNvPicPr>
+            <a:picLocks noChangeAspect="1" noChangeArrowheads="1"/>
+          </p:cNvPicPr>
+          <p:nvPr/>
+        </p:nvPicPr>
+        <p:blipFill>
+          <a:blip r:embed="rId16">
+            <a:extLst>
+              <a:ext uri="{28A0092B-C50C-407E-A947-70E740481C1C}">
+                <a14:useLocalDpi xmlns:a14="http://schemas.microsoft.com/office/drawing/2010/main" val="0"/>
+              </a:ext>
+            </a:extLst>
+          </a:blip>
+          <a:srcRect/>
+          <a:stretch>
+            <a:fillRect/>
+          </a:stretch>
+        </p:blipFill>
+        <p:spPr bwMode="auto">
+          <a:xfrm>
+            <a:off x="7373494" y="20650200"/>
+            <a:ext cx="5624693" cy="997402"/>
+          </a:xfrm>
+          <a:prstGeom prst="rect">
+            <a:avLst/>
+          </a:prstGeom>
+          <a:noFill/>
+          <a:extLst>
+            <a:ext uri="{909E8E84-426E-40DD-AFC4-6F175D3DCCD1}">
+              <a14:hiddenFill xmlns:a14="http://schemas.microsoft.com/office/drawing/2010/main">
+                <a:solidFill>
+                  <a:srgbClr val="FFFFFF"/>
+                </a:solidFill>
+              </a14:hiddenFill>
+            </a:ext>
+          </a:extLst>
+        </p:spPr>
+      </p:pic>
+      <p:pic>
+        <p:nvPicPr>
+          <p:cNvPr id="1035" name="Picture 11">
+            <a:hlinkClick r:id="rId17"/>
+            <a:extLst>
+              <a:ext uri="{FF2B5EF4-FFF2-40B4-BE49-F238E27FC236}">
+                <a16:creationId xmlns:a16="http://schemas.microsoft.com/office/drawing/2014/main" id="{A0A8EE7C-8449-5887-9DE1-757203A7D14C}"/>
+              </a:ext>
+            </a:extLst>
+          </p:cNvPr>
+          <p:cNvPicPr>
+            <a:picLocks noChangeAspect="1" noChangeArrowheads="1"/>
+          </p:cNvPicPr>
+          <p:nvPr/>
+        </p:nvPicPr>
+        <p:blipFill>
+          <a:blip r:embed="rId18">
+            <a:extLst>
+              <a:ext uri="{28A0092B-C50C-407E-A947-70E740481C1C}">
+                <a14:useLocalDpi xmlns:a14="http://schemas.microsoft.com/office/drawing/2010/main" val="0"/>
+              </a:ext>
+            </a:extLst>
+          </a:blip>
+          <a:srcRect/>
+          <a:stretch>
+            <a:fillRect/>
+          </a:stretch>
+        </p:blipFill>
+        <p:spPr bwMode="auto">
+          <a:xfrm>
+            <a:off x="7315200" y="21939016"/>
+            <a:ext cx="5679144" cy="539984"/>
+          </a:xfrm>
+          <a:prstGeom prst="rect">
+            <a:avLst/>
+          </a:prstGeom>
+          <a:noFill/>
+          <a:extLst>
+            <a:ext uri="{909E8E84-426E-40DD-AFC4-6F175D3DCCD1}">
+              <a14:hiddenFill xmlns:a14="http://schemas.microsoft.com/office/drawing/2010/main">
+                <a:solidFill>
+                  <a:srgbClr val="FFFFFF"/>
+                </a:solidFill>
+              </a14:hiddenFill>
+            </a:ext>
+          </a:extLst>
+        </p:spPr>
+      </p:pic>
+      <p:pic>
+        <p:nvPicPr>
+          <p:cNvPr id="1037" name="Picture 13">
+            <a:hlinkClick r:id="rId19"/>
+            <a:extLst>
+              <a:ext uri="{FF2B5EF4-FFF2-40B4-BE49-F238E27FC236}">
+                <a16:creationId xmlns:a16="http://schemas.microsoft.com/office/drawing/2014/main" id="{FF5EAD6F-9189-5750-450F-A26524176AFA}"/>
+              </a:ext>
+            </a:extLst>
+          </p:cNvPr>
+          <p:cNvPicPr>
+            <a:picLocks noChangeAspect="1" noChangeArrowheads="1"/>
+          </p:cNvPicPr>
+          <p:nvPr/>
+        </p:nvPicPr>
+        <p:blipFill>
+          <a:blip r:embed="rId20">
+            <a:extLst>
+              <a:ext uri="{28A0092B-C50C-407E-A947-70E740481C1C}">
+                <a14:useLocalDpi xmlns:a14="http://schemas.microsoft.com/office/drawing/2010/main" val="0"/>
+              </a:ext>
+            </a:extLst>
+          </a:blip>
+          <a:srcRect/>
+          <a:stretch>
+            <a:fillRect/>
+          </a:stretch>
+        </p:blipFill>
+        <p:spPr bwMode="auto">
+          <a:xfrm>
+            <a:off x="7346268" y="22871679"/>
+            <a:ext cx="5679144" cy="554529"/>
+          </a:xfrm>
+          <a:prstGeom prst="rect">
+            <a:avLst/>
+          </a:prstGeom>
+          <a:noFill/>
+          <a:extLst>
+            <a:ext uri="{909E8E84-426E-40DD-AFC4-6F175D3DCCD1}">
+              <a14:hiddenFill xmlns:a14="http://schemas.microsoft.com/office/drawing/2010/main">
+                <a:solidFill>
+                  <a:srgbClr val="FFFFFF"/>
+                </a:solidFill>
+              </a14:hiddenFill>
+            </a:ext>
+          </a:extLst>
+        </p:spPr>
+      </p:pic>
+      <p:pic>
+        <p:nvPicPr>
+          <p:cNvPr id="1039" name="Picture 15">
+            <a:hlinkClick r:id="rId21"/>
+            <a:extLst>
+              <a:ext uri="{FF2B5EF4-FFF2-40B4-BE49-F238E27FC236}">
+                <a16:creationId xmlns:a16="http://schemas.microsoft.com/office/drawing/2014/main" id="{2A0CFA2E-9708-13A8-2DDD-A372B925513F}"/>
+              </a:ext>
+            </a:extLst>
+          </p:cNvPr>
+          <p:cNvPicPr>
+            <a:picLocks noChangeAspect="1" noChangeArrowheads="1"/>
+          </p:cNvPicPr>
+          <p:nvPr/>
+        </p:nvPicPr>
+        <p:blipFill>
+          <a:blip r:embed="rId22">
+            <a:extLst>
+              <a:ext uri="{28A0092B-C50C-407E-A947-70E740481C1C}">
+                <a14:useLocalDpi xmlns:a14="http://schemas.microsoft.com/office/drawing/2010/main" val="0"/>
+              </a:ext>
+            </a:extLst>
+          </a:blip>
+          <a:srcRect/>
+          <a:stretch>
+            <a:fillRect/>
+          </a:stretch>
+        </p:blipFill>
+        <p:spPr bwMode="auto">
+          <a:xfrm>
+            <a:off x="7346268" y="23698200"/>
+            <a:ext cx="4264137" cy="554529"/>
+          </a:xfrm>
+          <a:prstGeom prst="rect">
+            <a:avLst/>
+          </a:prstGeom>
+          <a:noFill/>
+          <a:extLst>
+            <a:ext uri="{909E8E84-426E-40DD-AFC4-6F175D3DCCD1}">
+              <a14:hiddenFill xmlns:a14="http://schemas.microsoft.com/office/drawing/2010/main">
+                <a:solidFill>
+                  <a:srgbClr val="FFFFFF"/>
+                </a:solidFill>
+              </a14:hiddenFill>
+            </a:ext>
+          </a:extLst>
+        </p:spPr>
+      </p:pic>
+      <p:pic>
+        <p:nvPicPr>
+          <p:cNvPr id="1041" name="Picture 17">
+            <a:hlinkClick r:id="rId23"/>
+            <a:extLst>
+              <a:ext uri="{FF2B5EF4-FFF2-40B4-BE49-F238E27FC236}">
+                <a16:creationId xmlns:a16="http://schemas.microsoft.com/office/drawing/2014/main" id="{B2E0CE87-5844-9BAF-C8C2-ABC7FB51CF8D}"/>
+              </a:ext>
+            </a:extLst>
+          </p:cNvPr>
+          <p:cNvPicPr>
+            <a:picLocks noChangeAspect="1" noChangeArrowheads="1"/>
+          </p:cNvPicPr>
+          <p:nvPr/>
+        </p:nvPicPr>
+        <p:blipFill>
+          <a:blip r:embed="rId24">
+            <a:extLst>
+              <a:ext uri="{28A0092B-C50C-407E-A947-70E740481C1C}">
+                <a14:useLocalDpi xmlns:a14="http://schemas.microsoft.com/office/drawing/2010/main" val="0"/>
+              </a:ext>
+            </a:extLst>
+          </a:blip>
+          <a:srcRect/>
+          <a:stretch>
+            <a:fillRect/>
+          </a:stretch>
+        </p:blipFill>
+        <p:spPr bwMode="auto">
+          <a:xfrm>
+            <a:off x="7351295" y="24509744"/>
+            <a:ext cx="4111163" cy="554529"/>
+          </a:xfrm>
+          <a:prstGeom prst="rect">
+            <a:avLst/>
+          </a:prstGeom>
+          <a:noFill/>
+          <a:extLst>
+            <a:ext uri="{909E8E84-426E-40DD-AFC4-6F175D3DCCD1}">
+              <a14:hiddenFill xmlns:a14="http://schemas.microsoft.com/office/drawing/2010/main">
+                <a:solidFill>
+                  <a:srgbClr val="FFFFFF"/>
+                </a:solidFill>
+              </a14:hiddenFill>
+            </a:ext>
+          </a:extLst>
+        </p:spPr>
+      </p:pic>
     </p:spTree>
   </p:cSld>
   <p:clrMapOvr>
